--- a/docs/presentation/2026-09-14-parts1-2-anlin-theme.pptx
+++ b/docs/presentation/2026-09-14-parts1-2-anlin-theme.pptx
@@ -2502,10 +2502,10 @@
 When you rebuild a survey like this, the hard part is not the software. The hard part is understanding what every single field on the form actually means. What counts as a volume. What belongs in one column and not another. Why two questions that look similar are counted differently.
 None of that is written in the old database. It lives in the practice of this community. And the person who translated it for us was Anlin.
 Over the past two and a half years, Anlin has explained fields to us question by question. She put us in touch with the right person at each library when we needed to check something. She coordinated the deadlines. She checked our migrated numbers against the historical record. And when we were stuck on a decision that was not ours to make, she made it, usually within a day.
-That is roughly N separate email threads across M months.
+To put a number on it: three hundred and fifty-six emails about CEAL, and a hundred and eighty-five Zoom meetings. Over twenty-nine months.
 So I want to say this plainly, and in front of all of you. This system is accurate because the Committee kept us accurate. Anlin, thank you.
 导演提示: 因为 Anlin 排在最后讲,这一页还能提前把她捧起来。说完看一眼镜头里的她再切页。
-需要你补:去邮箱数 thread 数和月数。</a:t>
+185 次 Zoom 会议比 356 封邮件更有冲击力 —— 两年半里平均每月六次会,听众自己会算这笔账。</a:t>
             </a:r>
             <a:endParaRPr lang="en-US" dirty="0"/>
           </a:p>
@@ -22437,12 +22437,12 @@
         </p:nvSpPr>
         <p:spPr>
           <a:xfrm>
-            <a:off x="457200" y="3218688"/>
-            <a:ext cx="2331720" cy="713232"/>
+            <a:off x="457200" y="3200400"/>
+            <a:ext cx="1600200" cy="987552"/>
           </a:xfrm>
           <a:prstGeom prst="roundRect">
             <a:avLst>
-              <a:gd name="adj" fmla="val 7692"/>
+              <a:gd name="adj" fmla="val 5556"/>
             </a:avLst>
           </a:prstGeom>
           <a:solidFill>
@@ -22465,7 +22465,7 @@
         <p:spPr>
           <a:xfrm>
             <a:off x="457200" y="3291840"/>
-            <a:ext cx="2331720" cy="585216"/>
+            <a:ext cx="1600200" cy="512064"/>
           </a:xfrm>
           <a:prstGeom prst="rect">
             <a:avLst/>
@@ -22481,7 +22481,7 @@
               <a:buNone/>
             </a:pPr>
             <a:r>
-              <a:rPr lang="en-US" sz="2000" b="1" dirty="0">
+              <a:rPr lang="en-US" sz="2800" b="1" dirty="0">
                 <a:solidFill>
                   <a:srgbClr val="FF6652"/>
                 </a:solidFill>
@@ -22489,16 +22489,38 @@
                 <a:ea typeface="Lexend SemiBold" pitchFamily="34" charset="-122"/>
                 <a:cs typeface="Lexend SemiBold" pitchFamily="34" charset="-120"/>
               </a:rPr>
-              <a:t>≈ N</a:t>
-            </a:r>
-            <a:endParaRPr lang="en-US" sz="2000" dirty="0"/>
-          </a:p>
+              <a:t>356</a:t>
+            </a:r>
+            <a:endParaRPr lang="en-US" sz="2800" dirty="0"/>
+          </a:p>
+        </p:txBody>
+      </p:sp>
+      <p:sp>
+        <p:nvSpPr>
+          <p:cNvPr id="10" name="Text 8"/>
+          <p:cNvSpPr txBox="1"/>
+          <p:nvPr/>
+        </p:nvSpPr>
+        <p:spPr>
+          <a:xfrm>
+            <a:off x="457200" y="3822192"/>
+            <a:ext cx="1600200" cy="274320"/>
+          </a:xfrm>
+          <a:prstGeom prst="rect">
+            <a:avLst/>
+          </a:prstGeom>
+          <a:noFill/>
+          <a:ln/>
+        </p:spPr>
+        <p:txBody>
+          <a:bodyPr wrap="square" lIns="0" tIns="0" rIns="0" bIns="0" rtlCol="0" anchor="ctr"/>
+          <a:lstStyle/>
           <a:p>
             <a:pPr algn="ctr" indent="0" marL="0">
               <a:buNone/>
             </a:pPr>
             <a:r>
-              <a:rPr lang="en-US" sz="700" spc="80" kern="0" dirty="0">
+              <a:rPr lang="en-US" sz="750" spc="100" kern="0" dirty="0">
                 <a:solidFill>
                   <a:srgbClr val="76766B"/>
                 </a:solidFill>
@@ -22506,22 +22528,49 @@
                 <a:ea typeface="Lexend" pitchFamily="34" charset="-122"/>
                 <a:cs typeface="Lexend" pitchFamily="34" charset="-120"/>
               </a:rPr>
-              <a:t>EMAIL THREADS, OVER M MONTHS</a:t>
-            </a:r>
-            <a:endParaRPr lang="en-US" sz="2000" dirty="0"/>
-          </a:p>
-        </p:txBody>
-      </p:sp>
-      <p:sp>
-        <p:nvSpPr>
-          <p:cNvPr id="10" name="Text 8"/>
-          <p:cNvSpPr txBox="1"/>
-          <p:nvPr/>
-        </p:nvSpPr>
-        <p:spPr>
-          <a:xfrm>
-            <a:off x="3017520" y="3255264"/>
-            <a:ext cx="5669280" cy="658368"/>
+              <a:t>EMAILS ABOUT CEAL</a:t>
+            </a:r>
+            <a:endParaRPr lang="en-US" sz="750" dirty="0"/>
+          </a:p>
+        </p:txBody>
+      </p:sp>
+      <p:sp>
+        <p:nvSpPr>
+          <p:cNvPr id="11" name="Shape 9"/>
+          <p:cNvSpPr/>
+          <p:nvPr/>
+        </p:nvSpPr>
+        <p:spPr>
+          <a:xfrm>
+            <a:off x="2194560" y="3200400"/>
+            <a:ext cx="1600200" cy="987552"/>
+          </a:xfrm>
+          <a:prstGeom prst="roundRect">
+            <a:avLst>
+              <a:gd name="adj" fmla="val 5556"/>
+            </a:avLst>
+          </a:prstGeom>
+          <a:solidFill>
+            <a:srgbClr val="FFFFFF"/>
+          </a:solidFill>
+          <a:ln w="9525">
+            <a:solidFill>
+              <a:srgbClr val="DBC89F"/>
+            </a:solidFill>
+            <a:prstDash val="solid"/>
+          </a:ln>
+        </p:spPr>
+      </p:sp>
+      <p:sp>
+        <p:nvSpPr>
+          <p:cNvPr id="12" name="Text 10"/>
+          <p:cNvSpPr txBox="1"/>
+          <p:nvPr/>
+        </p:nvSpPr>
+        <p:spPr>
+          <a:xfrm>
+            <a:off x="2194560" y="3291840"/>
+            <a:ext cx="1600200" cy="512064"/>
           </a:xfrm>
           <a:prstGeom prst="rect">
             <a:avLst/>
@@ -22533,34 +22582,92 @@
           <a:bodyPr wrap="square" lIns="0" tIns="0" rIns="0" bIns="0" rtlCol="0" anchor="ctr"/>
           <a:lstStyle/>
           <a:p>
-            <a:pPr indent="0" marL="0">
-              <a:lnSpc>
-                <a:spcPct val="110000"/>
-              </a:lnSpc>
-              <a:buNone/>
-            </a:pPr>
-            <a:r>
-              <a:rPr lang="en-US" sz="1200" b="1" dirty="0">
-                <a:solidFill>
-                  <a:srgbClr val="1D1D1D"/>
+            <a:pPr algn="ctr" indent="0" marL="0">
+              <a:buNone/>
+            </a:pPr>
+            <a:r>
+              <a:rPr lang="en-US" sz="2800" b="1" dirty="0">
+                <a:solidFill>
+                  <a:srgbClr val="51BD85"/>
                 </a:solidFill>
                 <a:latin typeface="Lexend SemiBold" pitchFamily="34" charset="0"/>
                 <a:ea typeface="Lexend SemiBold" pitchFamily="34" charset="-122"/>
                 <a:cs typeface="Lexend SemiBold" pitchFamily="34" charset="-120"/>
               </a:rPr>
-              <a:t>You cannot read these requirements out of a database.</a:t>
-            </a:r>
-            <a:endParaRPr lang="en-US" sz="1200" dirty="0"/>
-          </a:p>
+              <a:t>185</a:t>
+            </a:r>
+            <a:endParaRPr lang="en-US" sz="2800" dirty="0"/>
+          </a:p>
+        </p:txBody>
+      </p:sp>
+      <p:sp>
+        <p:nvSpPr>
+          <p:cNvPr id="13" name="Text 11"/>
+          <p:cNvSpPr txBox="1"/>
+          <p:nvPr/>
+        </p:nvSpPr>
+        <p:spPr>
+          <a:xfrm>
+            <a:off x="2194560" y="3822192"/>
+            <a:ext cx="1600200" cy="274320"/>
+          </a:xfrm>
+          <a:prstGeom prst="rect">
+            <a:avLst/>
+          </a:prstGeom>
+          <a:noFill/>
+          <a:ln/>
+        </p:spPr>
+        <p:txBody>
+          <a:bodyPr wrap="square" lIns="0" tIns="0" rIns="0" bIns="0" rtlCol="0" anchor="ctr"/>
+          <a:lstStyle/>
+          <a:p>
+            <a:pPr algn="ctr" indent="0" marL="0">
+              <a:buNone/>
+            </a:pPr>
+            <a:r>
+              <a:rPr lang="en-US" sz="750" spc="100" kern="0" dirty="0">
+                <a:solidFill>
+                  <a:srgbClr val="76766B"/>
+                </a:solidFill>
+                <a:latin typeface="Lexend" pitchFamily="34" charset="0"/>
+                <a:ea typeface="Lexend" pitchFamily="34" charset="-122"/>
+                <a:cs typeface="Lexend" pitchFamily="34" charset="-120"/>
+              </a:rPr>
+              <a:t>ZOOM MEETINGS</a:t>
+            </a:r>
+            <a:endParaRPr lang="en-US" sz="750" dirty="0"/>
+          </a:p>
+        </p:txBody>
+      </p:sp>
+      <p:sp>
+        <p:nvSpPr>
+          <p:cNvPr id="14" name="Text 12"/>
+          <p:cNvSpPr txBox="1"/>
+          <p:nvPr/>
+        </p:nvSpPr>
+        <p:spPr>
+          <a:xfrm>
+            <a:off x="4069080" y="3218688"/>
+            <a:ext cx="4617720" cy="950976"/>
+          </a:xfrm>
+          <a:prstGeom prst="rect">
+            <a:avLst/>
+          </a:prstGeom>
+          <a:noFill/>
+          <a:ln/>
+        </p:spPr>
+        <p:txBody>
+          <a:bodyPr wrap="square" lIns="0" tIns="0" rIns="0" bIns="0" rtlCol="0" anchor="ctr"/>
+          <a:lstStyle/>
           <a:p>
             <a:pPr indent="0" marL="0">
               <a:lnSpc>
-                <a:spcPct val="110000"/>
+                <a:spcPct val="112000"/>
               </a:lnSpc>
               <a:buNone/>
             </a:pPr>
             <a:r>
-              <a:rPr lang="en-US" sz="1200" b="1" dirty="0">
+              <a:rPr lang="en-US" sz="1150" b="1" dirty="0">
                 <a:solidFill>
                   <a:srgbClr val="1D1D1D"/>
                 </a:solidFill>
@@ -22568,48 +22675,29 @@
                 <a:ea typeface="Lexend SemiBold" pitchFamily="34" charset="-122"/>
                 <a:cs typeface="Lexend SemiBold" pitchFamily="34" charset="-120"/>
               </a:rPr>
-              <a:t>They came out of that correspondence.</a:t>
-            </a:r>
-            <a:endParaRPr lang="en-US" sz="1200" dirty="0"/>
-          </a:p>
-        </p:txBody>
-      </p:sp>
-      <p:sp>
-        <p:nvSpPr>
-          <p:cNvPr id="11" name="Text 9"/>
-          <p:cNvSpPr txBox="1"/>
-          <p:nvPr/>
-        </p:nvSpPr>
-        <p:spPr>
-          <a:xfrm>
-            <a:off x="457200" y="4096512"/>
-            <a:ext cx="8229600" cy="219456"/>
-          </a:xfrm>
-          <a:prstGeom prst="rect">
-            <a:avLst/>
-          </a:prstGeom>
-          <a:noFill/>
-          <a:ln/>
-        </p:spPr>
-        <p:txBody>
-          <a:bodyPr wrap="square" lIns="0" tIns="0" rIns="0" bIns="0" rtlCol="0" anchor="ctr"/>
-          <a:lstStyle/>
+              <a:t>Over twenty-nine months.</a:t>
+            </a:r>
+            <a:endParaRPr lang="en-US" sz="1150" dirty="0"/>
+          </a:p>
           <a:p>
             <a:pPr indent="0" marL="0">
-              <a:buNone/>
-            </a:pPr>
-            <a:r>
-              <a:rPr lang="en-US" sz="800" i="1" dirty="0">
-                <a:solidFill>
-                  <a:srgbClr val="76766B"/>
-                </a:solidFill>
-                <a:latin typeface="Lexend" pitchFamily="34" charset="0"/>
-                <a:ea typeface="Lexend" pitchFamily="34" charset="-122"/>
-                <a:cs typeface="Lexend" pitchFamily="34" charset="-120"/>
-              </a:rPr>
-              <a:t>[需要你补] 把 N 和 M 换成邮箱里的真实数字</a:t>
-            </a:r>
-            <a:endParaRPr lang="en-US" sz="800" dirty="0"/>
+              <a:lnSpc>
+                <a:spcPct val="112000"/>
+              </a:lnSpc>
+              <a:buNone/>
+            </a:pPr>
+            <a:r>
+              <a:rPr lang="en-US" sz="1150" b="1" dirty="0">
+                <a:solidFill>
+                  <a:srgbClr val="1D1D1D"/>
+                </a:solidFill>
+                <a:latin typeface="Lexend SemiBold" pitchFamily="34" charset="0"/>
+                <a:ea typeface="Lexend SemiBold" pitchFamily="34" charset="-122"/>
+                <a:cs typeface="Lexend SemiBold" pitchFamily="34" charset="-120"/>
+              </a:rPr>
+              <a:t>You cannot read these requirements out of a database — they came out of that conversation.</a:t>
+            </a:r>
+            <a:endParaRPr lang="en-US" sz="1150" dirty="0"/>
           </a:p>
         </p:txBody>
       </p:sp>

--- a/docs/presentation/2026-09-14-parts1-2-anlin-theme.pptx
+++ b/docs/presentation/2026-09-14-parts1-2-anlin-theme.pptx
@@ -2216,10 +2216,14 @@
               <a:t>MENG — ~1.5 min
 Let me start with the old site, and let me start by being fair to it.
 That site did its job for two decades. Every number was in there. Every form was in there. It never lost anyone's data. Whoever built it deserves credit, and some of them may be on this call.
-[可删] But it was built for a desktop computer in the early two thousands. If you opened it on your phone, you had to pinch and scroll sideways to read a table. The page had a fixed width, so on a large monitor most of your screen was empty. The colours were hard on the eyes.
+[指左边] This is what you saw after signing in. Everything works — but it is a wall of links, and you have to already know what you are looking for.
+[指右边] This is the same moment on the new site. Your name, your institution, what you are allowed to do, and the three things you most likely came to do.
+[可删] It was built for a desktop computer in the early two thousands. On a phone you had to pinch and scroll sideways to read a table. The page had a fixed width, so on a large monitor most of your screen was empty.
 And there was a bigger problem, one you would only notice if you were on the Committee. Almost nothing could be changed without a developer. Opening the survey, sending the announcement, adding a new library — all of it meant emailing someone technical and waiting.
 That is the situation we were asked to fix.
-导演提示: 必须先夸旧站再说问题。Anlin 第 2 页已经讲了 KU 停止托管那条线,这里不要重复,直接讲"网站本身老了"。</a:t>
+导演提示: 两张图都是"登录后第一屏",对比公平,不会被说是挑软柿子。
+必须先夸旧站再说问题。Anlin 第 2 页已讲 KU 停止托管,这里不要重复。
+旧站首页那张(满屏文字)可以留作 Q&amp;A 备用,或换掉左边这张。</a:t>
             </a:r>
             <a:endParaRPr lang="en-US" dirty="0"/>
           </a:p>
@@ -2690,11 +2694,11 @@
               <a:t>MENG — ~2 min
 Now the part I am most pleased about, and the part that matters most to the Committee.
 On the old site, running the survey meant asking a developer. Opening the forms was a developer task. Sending the announcement was a developer task. Changing a date was a developer task.
-All of that is now a page on the site.
-The Chair sets the opening and closing dates herself. Opening a new survey year creates the records for all fifty libraries in one action. If a date needs to slip, there is a button for that. The announcement email can be previewed, then sent now or scheduled for later. And the wording of every automatic message can be edited right in the browser — no developer, no waiting.
-I want to point out the last item on that list, because it came directly out of last year's collection. A library joined partway through the season. The announcement had already gone out weeks earlier, so their delegate never got it. Under the old system, the fix was to email me.
-Now the Chair opens the user list, finds that one person, and clicks a button that sends them their own copy of the announcement. That is it.
-导演提示: 最后那个例子是真事,讲具体故事比列功能有效。</a:t>
+All of that is now this one page.
+[指截图] Survey dates. Open and close the annual surveys. Email templates. Manage users. Manage participating institutions. Manage the published PDFs. The Chair does all of it herself.
+I want to point out one thing in particular, because it came directly out of last year's collection. A library joined partway through the season. The announcement had already gone out weeks earlier, so their delegate never got it. Under the old system, the fix was to email me.
+Now the Chair opens the user list, finds that one person, and clicks a button that sends them their own copy. That is it.
+导演提示: 截图本身就列全了六个工具,不用再念一遍。挑两三个说,重点讲最后那个真实例子。</a:t>
             </a:r>
             <a:endParaRPr lang="en-US" dirty="0"/>
           </a:p>
@@ -18067,7 +18071,7 @@
                 <a:ea typeface="Lexend" pitchFamily="34" charset="-122"/>
                 <a:cs typeface="Lexend" pitchFamily="34" charset="-120"/>
               </a:rPr>
-              <a:t>THE SITE WE INHERITED</a:t>
+              <a:t>THE SAME SCREEN, THEN AND NOW</a:t>
             </a:r>
             <a:endParaRPr lang="en-US" sz="850" dirty="0"/>
           </a:p>
@@ -18153,18 +18157,258 @@
       </p:sp>
       <p:sp>
         <p:nvSpPr>
-          <p:cNvPr id="5" name="Shape 3"/>
+          <p:cNvPr id="5" name="Text 3"/>
+          <p:cNvSpPr txBox="1"/>
+          <p:nvPr/>
+        </p:nvSpPr>
+        <p:spPr>
+          <a:xfrm>
+            <a:off x="1234440" y="1060704"/>
+            <a:ext cx="3154680" cy="219456"/>
+          </a:xfrm>
+          <a:prstGeom prst="rect">
+            <a:avLst/>
+          </a:prstGeom>
+          <a:noFill/>
+          <a:ln/>
+        </p:spPr>
+        <p:txBody>
+          <a:bodyPr wrap="square" lIns="0" tIns="0" rIns="0" bIns="0" rtlCol="0" anchor="ctr"/>
+          <a:lstStyle/>
+          <a:p>
+            <a:pPr indent="0" marL="0">
+              <a:buNone/>
+            </a:pPr>
+            <a:r>
+              <a:rPr lang="en-US" sz="950" b="1" spc="80" kern="0" dirty="0">
+                <a:solidFill>
+                  <a:srgbClr val="76766B"/>
+                </a:solidFill>
+                <a:latin typeface="Lexend SemiBold" pitchFamily="34" charset="0"/>
+                <a:ea typeface="Lexend SemiBold" pitchFamily="34" charset="-122"/>
+                <a:cs typeface="Lexend SemiBold" pitchFamily="34" charset="-120"/>
+              </a:rPr>
+              <a:t>BEFORE  ·  ceal.ku.edu</a:t>
+            </a:r>
+            <a:endParaRPr lang="en-US" sz="950" dirty="0"/>
+          </a:p>
+        </p:txBody>
+      </p:sp>
+      <p:sp>
+        <p:nvSpPr>
+          <p:cNvPr id="6" name="Text 4"/>
+          <p:cNvSpPr txBox="1"/>
+          <p:nvPr/>
+        </p:nvSpPr>
+        <p:spPr>
+          <a:xfrm>
+            <a:off x="4754880" y="1060704"/>
+            <a:ext cx="3154680" cy="219456"/>
+          </a:xfrm>
+          <a:prstGeom prst="rect">
+            <a:avLst/>
+          </a:prstGeom>
+          <a:noFill/>
+          <a:ln/>
+        </p:spPr>
+        <p:txBody>
+          <a:bodyPr wrap="square" lIns="0" tIns="0" rIns="0" bIns="0" rtlCol="0" anchor="ctr"/>
+          <a:lstStyle/>
+          <a:p>
+            <a:pPr indent="0" marL="0">
+              <a:buNone/>
+            </a:pPr>
+            <a:r>
+              <a:rPr lang="en-US" sz="950" b="1" spc="80" kern="0" dirty="0">
+                <a:solidFill>
+                  <a:srgbClr val="FF6652"/>
+                </a:solidFill>
+                <a:latin typeface="Lexend SemiBold" pitchFamily="34" charset="0"/>
+                <a:ea typeface="Lexend SemiBold" pitchFamily="34" charset="-122"/>
+                <a:cs typeface="Lexend SemiBold" pitchFamily="34" charset="-120"/>
+              </a:rPr>
+              <a:t>AFTER  ·  cealstats.org</a:t>
+            </a:r>
+            <a:endParaRPr lang="en-US" sz="950" dirty="0"/>
+          </a:p>
+        </p:txBody>
+      </p:sp>
+      <p:sp>
+        <p:nvSpPr>
+          <p:cNvPr id="7" name="Shape 5"/>
           <p:cNvSpPr/>
           <p:nvPr/>
         </p:nvSpPr>
         <p:spPr>
           <a:xfrm>
-            <a:off x="457200" y="1143000"/>
-            <a:ext cx="4000500" cy="2148840"/>
+            <a:off x="1234440" y="1335024"/>
+            <a:ext cx="3154680" cy="2670048"/>
+          </a:xfrm>
+          <a:prstGeom prst="rect">
+            <a:avLst/>
+          </a:prstGeom>
+          <a:solidFill>
+            <a:srgbClr val="FFFFFF"/>
+          </a:solidFill>
+          <a:ln w="12700">
+            <a:solidFill>
+              <a:srgbClr val="DBC89F"/>
+            </a:solidFill>
+            <a:prstDash val="dash"/>
+          </a:ln>
+        </p:spPr>
+      </p:sp>
+      <p:sp>
+        <p:nvSpPr>
+          <p:cNvPr id="8" name="Text 6"/>
+          <p:cNvSpPr txBox="1"/>
+          <p:nvPr/>
+        </p:nvSpPr>
+        <p:spPr>
+          <a:xfrm>
+            <a:off x="1371600" y="2395728"/>
+            <a:ext cx="2880360" cy="548640"/>
+          </a:xfrm>
+          <a:prstGeom prst="rect">
+            <a:avLst/>
+          </a:prstGeom>
+          <a:noFill/>
+          <a:ln/>
+        </p:spPr>
+        <p:txBody>
+          <a:bodyPr wrap="square" lIns="0" tIns="0" rIns="0" bIns="0" rtlCol="0" anchor="ctr"/>
+          <a:lstStyle/>
+          <a:p>
+            <a:pPr algn="ctr" indent="0" marL="0">
+              <a:buNone/>
+            </a:pPr>
+            <a:r>
+              <a:rPr lang="en-US" sz="900" dirty="0">
+                <a:solidFill>
+                  <a:srgbClr val="76766B"/>
+                </a:solidFill>
+                <a:latin typeface="Lexend" pitchFamily="34" charset="0"/>
+                <a:ea typeface="Lexend" pitchFamily="34" charset="-122"/>
+                <a:cs typeface="Lexend" pitchFamily="34" charset="-120"/>
+              </a:rPr>
+              <a:t>旧站会员区</a:t>
+            </a:r>
+            <a:endParaRPr lang="en-US" sz="900" dirty="0"/>
+          </a:p>
+          <a:p>
+            <a:pPr algn="ctr" indent="0" marL="0">
+              <a:buNone/>
+            </a:pPr>
+            <a:r>
+              <a:rPr lang="en-US" sz="900" dirty="0">
+                <a:solidFill>
+                  <a:srgbClr val="76766B"/>
+                </a:solidFill>
+                <a:latin typeface="Lexend" pitchFamily="34" charset="0"/>
+                <a:ea typeface="Lexend" pitchFamily="34" charset="-122"/>
+                <a:cs typeface="Lexend" pitchFamily="34" charset="-120"/>
+              </a:rPr>
+              <a:t>ceal.ku.edu/member</a:t>
+            </a:r>
+            <a:endParaRPr lang="en-US" sz="900" dirty="0"/>
+          </a:p>
+        </p:txBody>
+      </p:sp>
+      <p:sp>
+        <p:nvSpPr>
+          <p:cNvPr id="9" name="Shape 7"/>
+          <p:cNvSpPr/>
+          <p:nvPr/>
+        </p:nvSpPr>
+        <p:spPr>
+          <a:xfrm>
+            <a:off x="4754880" y="1335024"/>
+            <a:ext cx="3154680" cy="2670048"/>
+          </a:xfrm>
+          <a:prstGeom prst="rect">
+            <a:avLst/>
+          </a:prstGeom>
+          <a:solidFill>
+            <a:srgbClr val="FFFFFF"/>
+          </a:solidFill>
+          <a:ln w="12700">
+            <a:solidFill>
+              <a:srgbClr val="DBC89F"/>
+            </a:solidFill>
+            <a:prstDash val="dash"/>
+          </a:ln>
+        </p:spPr>
+      </p:sp>
+      <p:sp>
+        <p:nvSpPr>
+          <p:cNvPr id="10" name="Text 8"/>
+          <p:cNvSpPr txBox="1"/>
+          <p:nvPr/>
+        </p:nvSpPr>
+        <p:spPr>
+          <a:xfrm>
+            <a:off x="4892040" y="2395728"/>
+            <a:ext cx="2880360" cy="548640"/>
+          </a:xfrm>
+          <a:prstGeom prst="rect">
+            <a:avLst/>
+          </a:prstGeom>
+          <a:noFill/>
+          <a:ln/>
+        </p:spPr>
+        <p:txBody>
+          <a:bodyPr wrap="square" lIns="0" tIns="0" rIns="0" bIns="0" rtlCol="0" anchor="ctr"/>
+          <a:lstStyle/>
+          <a:p>
+            <a:pPr algn="ctr" indent="0" marL="0">
+              <a:buNone/>
+            </a:pPr>
+            <a:r>
+              <a:rPr lang="en-US" sz="900" dirty="0">
+                <a:solidFill>
+                  <a:srgbClr val="76766B"/>
+                </a:solidFill>
+                <a:latin typeface="Lexend" pitchFamily="34" charset="0"/>
+                <a:ea typeface="Lexend" pitchFamily="34" charset="-122"/>
+                <a:cs typeface="Lexend" pitchFamily="34" charset="-120"/>
+              </a:rPr>
+              <a:t>新站 Dashboard</a:t>
+            </a:r>
+            <a:endParaRPr lang="en-US" sz="900" dirty="0"/>
+          </a:p>
+          <a:p>
+            <a:pPr algn="ctr" indent="0" marL="0">
+              <a:buNone/>
+            </a:pPr>
+            <a:r>
+              <a:rPr lang="en-US" sz="900" dirty="0">
+                <a:solidFill>
+                  <a:srgbClr val="76766B"/>
+                </a:solidFill>
+                <a:latin typeface="Lexend" pitchFamily="34" charset="0"/>
+                <a:ea typeface="Lexend" pitchFamily="34" charset="-122"/>
+                <a:cs typeface="Lexend" pitchFamily="34" charset="-120"/>
+              </a:rPr>
+              <a:t>cealstats.org/admin</a:t>
+            </a:r>
+            <a:endParaRPr lang="en-US" sz="900" dirty="0"/>
+          </a:p>
+        </p:txBody>
+      </p:sp>
+      <p:sp>
+        <p:nvSpPr>
+          <p:cNvPr id="11" name="Shape 9"/>
+          <p:cNvSpPr/>
+          <p:nvPr/>
+        </p:nvSpPr>
+        <p:spPr>
+          <a:xfrm>
+            <a:off x="457200" y="4169664"/>
+            <a:ext cx="8229600" cy="566928"/>
           </a:xfrm>
           <a:prstGeom prst="roundRect">
             <a:avLst>
-              <a:gd name="adj" fmla="val 2553"/>
+              <a:gd name="adj" fmla="val 9677"/>
             </a:avLst>
           </a:prstGeom>
           <a:solidFill>
@@ -18180,14 +18424,14 @@
       </p:sp>
       <p:sp>
         <p:nvSpPr>
-          <p:cNvPr id="6" name="Text 4"/>
-          <p:cNvSpPr txBox="1"/>
-          <p:nvPr/>
-        </p:nvSpPr>
-        <p:spPr>
-          <a:xfrm>
-            <a:off x="640080" y="1261872"/>
-            <a:ext cx="3634740" cy="237744"/>
+          <p:cNvPr id="12" name="Text 10"/>
+          <p:cNvSpPr txBox="1"/>
+          <p:nvPr/>
+        </p:nvSpPr>
+        <p:spPr>
+          <a:xfrm>
+            <a:off x="640080" y="4206240"/>
+            <a:ext cx="7863840" cy="493776"/>
           </a:xfrm>
           <a:prstGeom prst="rect">
             <a:avLst/>
@@ -18205,377 +18449,15 @@
             <a:r>
               <a:rPr lang="en-US" sz="1150" b="1" dirty="0">
                 <a:solidFill>
-                  <a:srgbClr val="51BD85"/>
+                  <a:srgbClr val="1D1D1D"/>
                 </a:solidFill>
                 <a:latin typeface="Lexend SemiBold" pitchFamily="34" charset="0"/>
                 <a:ea typeface="Lexend SemiBold" pitchFamily="34" charset="-122"/>
                 <a:cs typeface="Lexend SemiBold" pitchFamily="34" charset="-120"/>
               </a:rPr>
-              <a:t>What it did well — for twenty years</a:t>
+              <a:t>Both of these are the first screen you see after signing in.</a:t>
             </a:r>
             <a:endParaRPr lang="en-US" sz="1150" dirty="0"/>
-          </a:p>
-        </p:txBody>
-      </p:sp>
-      <p:sp>
-        <p:nvSpPr>
-          <p:cNvPr id="7" name="Text 5"/>
-          <p:cNvSpPr txBox="1"/>
-          <p:nvPr/>
-        </p:nvSpPr>
-        <p:spPr>
-          <a:xfrm>
-            <a:off x="640080" y="1554480"/>
-            <a:ext cx="3634740" cy="1645920"/>
-          </a:xfrm>
-          <a:prstGeom prst="rect">
-            <a:avLst/>
-          </a:prstGeom>
-          <a:noFill/>
-          <a:ln/>
-        </p:spPr>
-        <p:txBody>
-          <a:bodyPr wrap="square" lIns="0" tIns="0" rIns="0" bIns="0" rtlCol="0" anchor="t"/>
-          <a:lstStyle/>
-          <a:p>
-            <a:pPr marL="152400" indent="-152400">
-              <a:spcAft>
-                <a:spcPts val="600"/>
-              </a:spcAft>
-              <a:buSzPct val="100000"/>
-              <a:buChar char="•"/>
-            </a:pPr>
-            <a:r>
-              <a:rPr lang="en-US" sz="1000" dirty="0">
-                <a:solidFill>
-                  <a:srgbClr val="1D1D1D"/>
-                </a:solidFill>
-                <a:latin typeface="Lexend" pitchFamily="34" charset="0"/>
-                <a:ea typeface="Lexend" pitchFamily="34" charset="-122"/>
-                <a:cs typeface="Lexend" pitchFamily="34" charset="-120"/>
-              </a:rPr>
-              <a:t>Held every data point and every form, complete and correct</a:t>
-            </a:r>
-            <a:endParaRPr lang="en-US" sz="1000" dirty="0"/>
-          </a:p>
-          <a:p>
-            <a:pPr marL="152400" indent="-152400">
-              <a:spcAft>
-                <a:spcPts val="600"/>
-              </a:spcAft>
-              <a:buSzPct val="100000"/>
-              <a:buChar char="•"/>
-            </a:pPr>
-            <a:r>
-              <a:rPr lang="en-US" sz="1000" dirty="0">
-                <a:solidFill>
-                  <a:srgbClr val="1D1D1D"/>
-                </a:solidFill>
-                <a:latin typeface="Lexend" pitchFamily="34" charset="0"/>
-                <a:ea typeface="Lexend" pitchFamily="34" charset="-122"/>
-                <a:cs typeface="Lexend" pitchFamily="34" charset="-120"/>
-              </a:rPr>
-              <a:t>Served guests, member libraries and the Committee, reliably</a:t>
-            </a:r>
-            <a:endParaRPr lang="en-US" sz="1000" dirty="0"/>
-          </a:p>
-          <a:p>
-            <a:pPr marL="152400" indent="-152400">
-              <a:spcAft>
-                <a:spcPts val="600"/>
-              </a:spcAft>
-              <a:buSzPct val="100000"/>
-              <a:buChar char="•"/>
-            </a:pPr>
-            <a:r>
-              <a:rPr lang="en-US" sz="1000" dirty="0">
-                <a:solidFill>
-                  <a:srgbClr val="1D1D1D"/>
-                </a:solidFill>
-                <a:latin typeface="Lexend" pitchFamily="34" charset="0"/>
-                <a:ea typeface="Lexend" pitchFamily="34" charset="-122"/>
-                <a:cs typeface="Lexend" pitchFamily="34" charset="-120"/>
-              </a:rPr>
-              <a:t>Never lost anyone’s data</a:t>
-            </a:r>
-            <a:endParaRPr lang="en-US" sz="1000" dirty="0"/>
-          </a:p>
-        </p:txBody>
-      </p:sp>
-      <p:sp>
-        <p:nvSpPr>
-          <p:cNvPr id="8" name="Shape 6"/>
-          <p:cNvSpPr/>
-          <p:nvPr/>
-        </p:nvSpPr>
-        <p:spPr>
-          <a:xfrm>
-            <a:off x="4686300" y="1143000"/>
-            <a:ext cx="4000500" cy="2148840"/>
-          </a:xfrm>
-          <a:prstGeom prst="roundRect">
-            <a:avLst>
-              <a:gd name="adj" fmla="val 2553"/>
-            </a:avLst>
-          </a:prstGeom>
-          <a:solidFill>
-            <a:srgbClr val="FFFFFF"/>
-          </a:solidFill>
-          <a:ln w="9525">
-            <a:solidFill>
-              <a:srgbClr val="DBC89F"/>
-            </a:solidFill>
-            <a:prstDash val="solid"/>
-          </a:ln>
-        </p:spPr>
-      </p:sp>
-      <p:sp>
-        <p:nvSpPr>
-          <p:cNvPr id="9" name="Text 7"/>
-          <p:cNvSpPr txBox="1"/>
-          <p:nvPr/>
-        </p:nvSpPr>
-        <p:spPr>
-          <a:xfrm>
-            <a:off x="4869180" y="1261872"/>
-            <a:ext cx="3634740" cy="237744"/>
-          </a:xfrm>
-          <a:prstGeom prst="rect">
-            <a:avLst/>
-          </a:prstGeom>
-          <a:noFill/>
-          <a:ln/>
-        </p:spPr>
-        <p:txBody>
-          <a:bodyPr wrap="square" lIns="0" tIns="0" rIns="0" bIns="0" rtlCol="0" anchor="ctr"/>
-          <a:lstStyle/>
-          <a:p>
-            <a:pPr indent="0" marL="0">
-              <a:buNone/>
-            </a:pPr>
-            <a:r>
-              <a:rPr lang="en-US" sz="1150" b="1" dirty="0">
-                <a:solidFill>
-                  <a:srgbClr val="FF6652"/>
-                </a:solidFill>
-                <a:latin typeface="Lexend SemiBold" pitchFamily="34" charset="0"/>
-                <a:ea typeface="Lexend SemiBold" pitchFamily="34" charset="-122"/>
-                <a:cs typeface="Lexend SemiBold" pitchFamily="34" charset="-120"/>
-              </a:rPr>
-              <a:t>What it could no longer do</a:t>
-            </a:r>
-            <a:endParaRPr lang="en-US" sz="1150" dirty="0"/>
-          </a:p>
-        </p:txBody>
-      </p:sp>
-      <p:sp>
-        <p:nvSpPr>
-          <p:cNvPr id="10" name="Text 8"/>
-          <p:cNvSpPr txBox="1"/>
-          <p:nvPr/>
-        </p:nvSpPr>
-        <p:spPr>
-          <a:xfrm>
-            <a:off x="4869180" y="1554480"/>
-            <a:ext cx="3634740" cy="1645920"/>
-          </a:xfrm>
-          <a:prstGeom prst="rect">
-            <a:avLst/>
-          </a:prstGeom>
-          <a:noFill/>
-          <a:ln/>
-        </p:spPr>
-        <p:txBody>
-          <a:bodyPr wrap="square" lIns="0" tIns="0" rIns="0" bIns="0" rtlCol="0" anchor="t"/>
-          <a:lstStyle/>
-          <a:p>
-            <a:pPr marL="152400" indent="-152400">
-              <a:spcAft>
-                <a:spcPts val="600"/>
-              </a:spcAft>
-              <a:buSzPct val="100000"/>
-              <a:buChar char="•"/>
-            </a:pPr>
-            <a:r>
-              <a:rPr lang="en-US" sz="1000" dirty="0">
-                <a:solidFill>
-                  <a:srgbClr val="1D1D1D"/>
-                </a:solidFill>
-                <a:latin typeface="Lexend" pitchFamily="34" charset="0"/>
-                <a:ea typeface="Lexend" pitchFamily="34" charset="-122"/>
-                <a:cs typeface="Lexend" pitchFamily="34" charset="-120"/>
-              </a:rPr>
-              <a:t>Built for a desktop monitor. Unusable on a phone or tablet.</a:t>
-            </a:r>
-            <a:endParaRPr lang="en-US" sz="1000" dirty="0"/>
-          </a:p>
-          <a:p>
-            <a:pPr marL="152400" indent="-152400">
-              <a:spcAft>
-                <a:spcPts val="600"/>
-              </a:spcAft>
-              <a:buSzPct val="100000"/>
-              <a:buChar char="•"/>
-            </a:pPr>
-            <a:r>
-              <a:rPr lang="en-US" sz="1000" dirty="0">
-                <a:solidFill>
-                  <a:srgbClr val="1D1D1D"/>
-                </a:solidFill>
-                <a:latin typeface="Lexend" pitchFamily="34" charset="0"/>
-                <a:ea typeface="Lexend" pitchFamily="34" charset="-122"/>
-                <a:cs typeface="Lexend" pitchFamily="34" charset="-120"/>
-              </a:rPr>
-              <a:t>Fixed page width, dated colours, hard to read</a:t>
-            </a:r>
-            <a:endParaRPr lang="en-US" sz="1000" dirty="0"/>
-          </a:p>
-          <a:p>
-            <a:pPr marL="152400" indent="-152400">
-              <a:spcAft>
-                <a:spcPts val="600"/>
-              </a:spcAft>
-              <a:buSzPct val="100000"/>
-              <a:buChar char="•"/>
-            </a:pPr>
-            <a:r>
-              <a:rPr lang="en-US" sz="1000" dirty="0">
-                <a:solidFill>
-                  <a:srgbClr val="1D1D1D"/>
-                </a:solidFill>
-                <a:latin typeface="Lexend" pitchFamily="34" charset="0"/>
-                <a:ea typeface="Lexend" pitchFamily="34" charset="-122"/>
-                <a:cs typeface="Lexend" pitchFamily="34" charset="-120"/>
-              </a:rPr>
-              <a:t>Every administrative change needed a developer</a:t>
-            </a:r>
-            <a:endParaRPr lang="en-US" sz="1000" dirty="0"/>
-          </a:p>
-          <a:p>
-            <a:pPr marL="152400" indent="-152400">
-              <a:spcAft>
-                <a:spcPts val="600"/>
-              </a:spcAft>
-              <a:buSzPct val="100000"/>
-              <a:buChar char="•"/>
-            </a:pPr>
-            <a:r>
-              <a:rPr lang="en-US" sz="1000" dirty="0">
-                <a:solidFill>
-                  <a:srgbClr val="1D1D1D"/>
-                </a:solidFill>
-                <a:latin typeface="Lexend" pitchFamily="34" charset="0"/>
-                <a:ea typeface="Lexend" pitchFamily="34" charset="-122"/>
-                <a:cs typeface="Lexend" pitchFamily="34" charset="-120"/>
-              </a:rPr>
-              <a:t>Built on software getting harder to host safely</a:t>
-            </a:r>
-            <a:endParaRPr lang="en-US" sz="1000" dirty="0"/>
-          </a:p>
-        </p:txBody>
-      </p:sp>
-      <p:sp>
-        <p:nvSpPr>
-          <p:cNvPr id="11" name="Shape 9"/>
-          <p:cNvSpPr/>
-          <p:nvPr/>
-        </p:nvSpPr>
-        <p:spPr>
-          <a:xfrm>
-            <a:off x="457200" y="3456432"/>
-            <a:ext cx="8229600" cy="566928"/>
-          </a:xfrm>
-          <a:prstGeom prst="roundRect">
-            <a:avLst>
-              <a:gd name="adj" fmla="val 9677"/>
-            </a:avLst>
-          </a:prstGeom>
-          <a:solidFill>
-            <a:srgbClr val="D8E4D6"/>
-          </a:solidFill>
-          <a:ln w="9525">
-            <a:solidFill>
-              <a:srgbClr val="DBC89F"/>
-            </a:solidFill>
-            <a:prstDash val="solid"/>
-          </a:ln>
-        </p:spPr>
-      </p:sp>
-      <p:sp>
-        <p:nvSpPr>
-          <p:cNvPr id="12" name="Text 10"/>
-          <p:cNvSpPr txBox="1"/>
-          <p:nvPr/>
-        </p:nvSpPr>
-        <p:spPr>
-          <a:xfrm>
-            <a:off x="640080" y="3493008"/>
-            <a:ext cx="7863840" cy="493776"/>
-          </a:xfrm>
-          <a:prstGeom prst="rect">
-            <a:avLst/>
-          </a:prstGeom>
-          <a:noFill/>
-          <a:ln/>
-        </p:spPr>
-        <p:txBody>
-          <a:bodyPr wrap="square" lIns="0" tIns="0" rIns="0" bIns="0" rtlCol="0" anchor="ctr"/>
-          <a:lstStyle/>
-          <a:p>
-            <a:pPr indent="0" marL="0">
-              <a:buNone/>
-            </a:pPr>
-            <a:r>
-              <a:rPr lang="en-US" sz="1150" b="1" dirty="0">
-                <a:solidFill>
-                  <a:srgbClr val="51BD85"/>
-                </a:solidFill>
-                <a:latin typeface="Lexend SemiBold" pitchFamily="34" charset="0"/>
-                <a:ea typeface="Lexend SemiBold" pitchFamily="34" charset="-122"/>
-                <a:cs typeface="Lexend SemiBold" pitchFamily="34" charset="-120"/>
-              </a:rPr>
-              <a:t>Whoever built that site deserves credit. It did its job for two decades.</a:t>
-            </a:r>
-            <a:endParaRPr lang="en-US" sz="1150" dirty="0"/>
-          </a:p>
-        </p:txBody>
-      </p:sp>
-      <p:sp>
-        <p:nvSpPr>
-          <p:cNvPr id="13" name="Text 11"/>
-          <p:cNvSpPr txBox="1"/>
-          <p:nvPr/>
-        </p:nvSpPr>
-        <p:spPr>
-          <a:xfrm>
-            <a:off x="457200" y="4160520"/>
-            <a:ext cx="8229600" cy="219456"/>
-          </a:xfrm>
-          <a:prstGeom prst="rect">
-            <a:avLst/>
-          </a:prstGeom>
-          <a:noFill/>
-          <a:ln/>
-        </p:spPr>
-        <p:txBody>
-          <a:bodyPr wrap="square" lIns="0" tIns="0" rIns="0" bIns="0" rtlCol="0" anchor="ctr"/>
-          <a:lstStyle/>
-          <a:p>
-            <a:pPr indent="0" marL="0">
-              <a:buNone/>
-            </a:pPr>
-            <a:r>
-              <a:rPr lang="en-US" sz="800" i="1" dirty="0">
-                <a:solidFill>
-                  <a:srgbClr val="76766B"/>
-                </a:solidFill>
-                <a:latin typeface="Lexend" pitchFamily="34" charset="0"/>
-                <a:ea typeface="Lexend" pitchFamily="34" charset="-122"/>
-                <a:cs typeface="Lexend" pitchFamily="34" charset="-120"/>
-              </a:rPr>
-              <a:t>[截图] 用两张图替掉上面两个卡片：旧站首页 / 旧站 390px 宽</a:t>
-            </a:r>
-            <a:endParaRPr lang="en-US" sz="800" dirty="0"/>
           </a:p>
         </p:txBody>
       </p:sp>
@@ -23635,14 +23517,39 @@
       </p:sp>
       <p:sp>
         <p:nvSpPr>
-          <p:cNvPr id="5" name="Text 3"/>
-          <p:cNvSpPr txBox="1"/>
-          <p:nvPr/>
-        </p:nvSpPr>
-        <p:spPr>
-          <a:xfrm>
-            <a:off x="457200" y="1078992"/>
-            <a:ext cx="8229600" cy="219456"/>
+          <p:cNvPr id="5" name="Shape 3"/>
+          <p:cNvSpPr/>
+          <p:nvPr/>
+        </p:nvSpPr>
+        <p:spPr>
+          <a:xfrm>
+            <a:off x="457200" y="1170432"/>
+            <a:ext cx="3703320" cy="2852928"/>
+          </a:xfrm>
+          <a:prstGeom prst="rect">
+            <a:avLst/>
+          </a:prstGeom>
+          <a:solidFill>
+            <a:srgbClr val="FFFFFF"/>
+          </a:solidFill>
+          <a:ln w="12700">
+            <a:solidFill>
+              <a:srgbClr val="DBC89F"/>
+            </a:solidFill>
+            <a:prstDash val="dash"/>
+          </a:ln>
+        </p:spPr>
+      </p:sp>
+      <p:sp>
+        <p:nvSpPr>
+          <p:cNvPr id="6" name="Text 4"/>
+          <p:cNvSpPr txBox="1"/>
+          <p:nvPr/>
+        </p:nvSpPr>
+        <p:spPr>
+          <a:xfrm>
+            <a:off x="594360" y="2322576"/>
+            <a:ext cx="3429000" cy="548640"/>
           </a:xfrm>
           <a:prstGeom prst="rect">
             <a:avLst/>
@@ -23654,38 +23561,266 @@
           <a:bodyPr wrap="square" lIns="0" tIns="0" rIns="0" bIns="0" rtlCol="0" anchor="ctr"/>
           <a:lstStyle/>
           <a:p>
-            <a:pPr indent="0" marL="0">
-              <a:buNone/>
-            </a:pPr>
-            <a:r>
-              <a:rPr lang="en-US" sz="1000" i="1" dirty="0">
-                <a:solidFill>
-                  <a:srgbClr val="51BD85"/>
+            <a:pPr algn="ctr" indent="0" marL="0">
+              <a:buNone/>
+            </a:pPr>
+            <a:r>
+              <a:rPr lang="en-US" sz="900" dirty="0">
+                <a:solidFill>
+                  <a:srgbClr val="76766B"/>
                 </a:solidFill>
                 <a:latin typeface="Lexend" pitchFamily="34" charset="0"/>
                 <a:ea typeface="Lexend" pitchFamily="34" charset="-122"/>
                 <a:cs typeface="Lexend" pitchFamily="34" charset="-120"/>
               </a:rPr>
-              <a:t>Every one of these used to require a developer. Now each is a page on the site.</a:t>
-            </a:r>
-            <a:endParaRPr lang="en-US" sz="1000" dirty="0"/>
-          </a:p>
-        </p:txBody>
-      </p:sp>
-      <p:sp>
-        <p:nvSpPr>
-          <p:cNvPr id="6" name="Shape 4"/>
+              <a:t>Super Admin Toolkit</a:t>
+            </a:r>
+            <a:endParaRPr lang="en-US" sz="900" dirty="0"/>
+          </a:p>
+          <a:p>
+            <a:pPr algn="ctr" indent="0" marL="0">
+              <a:buNone/>
+            </a:pPr>
+            <a:r>
+              <a:rPr lang="en-US" sz="900" dirty="0">
+                <a:solidFill>
+                  <a:srgbClr val="76766B"/>
+                </a:solidFill>
+                <a:latin typeface="Lexend" pitchFamily="34" charset="0"/>
+                <a:ea typeface="Lexend" pitchFamily="34" charset="-122"/>
+                <a:cs typeface="Lexend" pitchFamily="34" charset="-120"/>
+              </a:rPr>
+              <a:t>新站截图</a:t>
+            </a:r>
+            <a:endParaRPr lang="en-US" sz="900" dirty="0"/>
+          </a:p>
+        </p:txBody>
+      </p:sp>
+      <p:sp>
+        <p:nvSpPr>
+          <p:cNvPr id="7" name="Shape 5"/>
           <p:cNvSpPr/>
           <p:nvPr/>
         </p:nvSpPr>
         <p:spPr>
           <a:xfrm>
-            <a:off x="457200" y="1389888"/>
-            <a:ext cx="2651760" cy="932688"/>
+            <a:off x="4434840" y="1170432"/>
+            <a:ext cx="4251960" cy="1170432"/>
           </a:xfrm>
           <a:prstGeom prst="roundRect">
             <a:avLst>
-              <a:gd name="adj" fmla="val 5882"/>
+              <a:gd name="adj" fmla="val 4688"/>
+            </a:avLst>
+          </a:prstGeom>
+          <a:solidFill>
+            <a:srgbClr val="D8E4D6"/>
+          </a:solidFill>
+          <a:ln w="9525">
+            <a:solidFill>
+              <a:srgbClr val="DBC89F"/>
+            </a:solidFill>
+            <a:prstDash val="solid"/>
+          </a:ln>
+        </p:spPr>
+      </p:sp>
+      <p:sp>
+        <p:nvSpPr>
+          <p:cNvPr id="8" name="Text 6"/>
+          <p:cNvSpPr txBox="1"/>
+          <p:nvPr/>
+        </p:nvSpPr>
+        <p:spPr>
+          <a:xfrm>
+            <a:off x="4617720" y="1243584"/>
+            <a:ext cx="3886200" cy="310896"/>
+          </a:xfrm>
+          <a:prstGeom prst="rect">
+            <a:avLst/>
+          </a:prstGeom>
+          <a:noFill/>
+          <a:ln/>
+        </p:spPr>
+        <p:txBody>
+          <a:bodyPr wrap="square" lIns="0" tIns="0" rIns="0" bIns="0" rtlCol="0" anchor="ctr"/>
+          <a:lstStyle/>
+          <a:p>
+            <a:pPr indent="0" marL="0">
+              <a:buNone/>
+            </a:pPr>
+            <a:r>
+              <a:rPr lang="en-US" sz="1200" b="1" dirty="0">
+                <a:solidFill>
+                  <a:srgbClr val="FF6652"/>
+                </a:solidFill>
+                <a:latin typeface="Lexend SemiBold" pitchFamily="34" charset="0"/>
+                <a:ea typeface="Lexend SemiBold" pitchFamily="34" charset="-122"/>
+                <a:cs typeface="Lexend SemiBold" pitchFamily="34" charset="-120"/>
+              </a:rPr>
+              <a:t>On the old site there was no screen like this.</a:t>
+            </a:r>
+            <a:endParaRPr lang="en-US" sz="1200" dirty="0"/>
+          </a:p>
+        </p:txBody>
+      </p:sp>
+      <p:sp>
+        <p:nvSpPr>
+          <p:cNvPr id="9" name="Text 7"/>
+          <p:cNvSpPr txBox="1"/>
+          <p:nvPr/>
+        </p:nvSpPr>
+        <p:spPr>
+          <a:xfrm>
+            <a:off x="4617720" y="1554480"/>
+            <a:ext cx="3886200" cy="713232"/>
+          </a:xfrm>
+          <a:prstGeom prst="rect">
+            <a:avLst/>
+          </a:prstGeom>
+          <a:noFill/>
+          <a:ln/>
+        </p:spPr>
+        <p:txBody>
+          <a:bodyPr wrap="square" lIns="0" tIns="0" rIns="0" bIns="0" rtlCol="0" anchor="t"/>
+          <a:lstStyle/>
+          <a:p>
+            <a:pPr indent="0" marL="0">
+              <a:buNone/>
+            </a:pPr>
+            <a:r>
+              <a:rPr lang="en-US" sz="950" dirty="0">
+                <a:solidFill>
+                  <a:srgbClr val="1D1D1D"/>
+                </a:solidFill>
+                <a:latin typeface="Lexend" pitchFamily="34" charset="0"/>
+                <a:ea typeface="Lexend" pitchFamily="34" charset="-122"/>
+                <a:cs typeface="Lexend" pitchFamily="34" charset="-120"/>
+              </a:rPr>
+              <a:t>Opening the survey, sending the announcement, changing a date — every one of those was a developer task, and meant emailing me and waiting.</a:t>
+            </a:r>
+            <a:endParaRPr lang="en-US" sz="950" dirty="0"/>
+          </a:p>
+        </p:txBody>
+      </p:sp>
+      <p:sp>
+        <p:nvSpPr>
+          <p:cNvPr id="10" name="Text 8"/>
+          <p:cNvSpPr txBox="1"/>
+          <p:nvPr/>
+        </p:nvSpPr>
+        <p:spPr>
+          <a:xfrm>
+            <a:off x="4617720" y="2487168"/>
+            <a:ext cx="3886200" cy="960120"/>
+          </a:xfrm>
+          <a:prstGeom prst="rect">
+            <a:avLst/>
+          </a:prstGeom>
+          <a:noFill/>
+          <a:ln/>
+        </p:spPr>
+        <p:txBody>
+          <a:bodyPr wrap="square" lIns="0" tIns="0" rIns="0" bIns="0" rtlCol="0" anchor="t"/>
+          <a:lstStyle/>
+          <a:p>
+            <a:pPr marL="152400" indent="-152400">
+              <a:spcAft>
+                <a:spcPts val="600"/>
+              </a:spcAft>
+              <a:buSzPct val="100000"/>
+              <a:buChar char="•"/>
+            </a:pPr>
+            <a:r>
+              <a:rPr lang="en-US" sz="950" dirty="0">
+                <a:solidFill>
+                  <a:srgbClr val="1D1D1D"/>
+                </a:solidFill>
+                <a:latin typeface="Lexend" pitchFamily="34" charset="0"/>
+                <a:ea typeface="Lexend" pitchFamily="34" charset="-122"/>
+                <a:cs typeface="Lexend" pitchFamily="34" charset="-120"/>
+              </a:rPr>
+              <a:t>Set the dates, per year</a:t>
+            </a:r>
+            <a:endParaRPr lang="en-US" sz="950" dirty="0"/>
+          </a:p>
+          <a:p>
+            <a:pPr marL="152400" indent="-152400">
+              <a:spcAft>
+                <a:spcPts val="600"/>
+              </a:spcAft>
+              <a:buSzPct val="100000"/>
+              <a:buChar char="•"/>
+            </a:pPr>
+            <a:r>
+              <a:rPr lang="en-US" sz="950" dirty="0">
+                <a:solidFill>
+                  <a:srgbClr val="1D1D1D"/>
+                </a:solidFill>
+                <a:latin typeface="Lexend" pitchFamily="34" charset="0"/>
+                <a:ea typeface="Lexend" pitchFamily="34" charset="-122"/>
+                <a:cs typeface="Lexend" pitchFamily="34" charset="-120"/>
+              </a:rPr>
+              <a:t>Open a new year for all 50 libraries at once</a:t>
+            </a:r>
+            <a:endParaRPr lang="en-US" sz="950" dirty="0"/>
+          </a:p>
+          <a:p>
+            <a:pPr marL="152400" indent="-152400">
+              <a:spcAft>
+                <a:spcPts val="600"/>
+              </a:spcAft>
+              <a:buSzPct val="100000"/>
+              <a:buChar char="•"/>
+            </a:pPr>
+            <a:r>
+              <a:rPr lang="en-US" sz="950" dirty="0">
+                <a:solidFill>
+                  <a:srgbClr val="1D1D1D"/>
+                </a:solidFill>
+                <a:latin typeface="Lexend" pitchFamily="34" charset="0"/>
+                <a:ea typeface="Lexend" pitchFamily="34" charset="-122"/>
+                <a:cs typeface="Lexend" pitchFamily="34" charset="-120"/>
+              </a:rPr>
+              <a:t>Open or close right now, when the schedule slips</a:t>
+            </a:r>
+            <a:endParaRPr lang="en-US" sz="950" dirty="0"/>
+          </a:p>
+          <a:p>
+            <a:pPr marL="152400" indent="-152400">
+              <a:spcAft>
+                <a:spcPts val="600"/>
+              </a:spcAft>
+              <a:buSzPct val="100000"/>
+              <a:buChar char="•"/>
+            </a:pPr>
+            <a:r>
+              <a:rPr lang="en-US" sz="950" dirty="0">
+                <a:solidFill>
+                  <a:srgbClr val="1D1D1D"/>
+                </a:solidFill>
+                <a:latin typeface="Lexend" pitchFamily="34" charset="0"/>
+                <a:ea typeface="Lexend" pitchFamily="34" charset="-122"/>
+                <a:cs typeface="Lexend" pitchFamily="34" charset="-120"/>
+              </a:rPr>
+              <a:t>Edit the wording of every automatic message</a:t>
+            </a:r>
+            <a:endParaRPr lang="en-US" sz="950" dirty="0"/>
+          </a:p>
+        </p:txBody>
+      </p:sp>
+      <p:sp>
+        <p:nvSpPr>
+          <p:cNvPr id="11" name="Shape 9"/>
+          <p:cNvSpPr/>
+          <p:nvPr/>
+        </p:nvSpPr>
+        <p:spPr>
+          <a:xfrm>
+            <a:off x="457200" y="4169664"/>
+            <a:ext cx="8229600" cy="566928"/>
+          </a:xfrm>
+          <a:prstGeom prst="roundRect">
+            <a:avLst>
+              <a:gd name="adj" fmla="val 9677"/>
             </a:avLst>
           </a:prstGeom>
           <a:solidFill>
@@ -23701,14 +23836,14 @@
       </p:sp>
       <p:sp>
         <p:nvSpPr>
-          <p:cNvPr id="7" name="Text 5"/>
-          <p:cNvSpPr txBox="1"/>
-          <p:nvPr/>
-        </p:nvSpPr>
-        <p:spPr>
-          <a:xfrm>
-            <a:off x="603504" y="1499616"/>
-            <a:ext cx="2359152" cy="237744"/>
+          <p:cNvPr id="12" name="Text 10"/>
+          <p:cNvSpPr txBox="1"/>
+          <p:nvPr/>
+        </p:nvSpPr>
+        <p:spPr>
+          <a:xfrm>
+            <a:off x="640080" y="4206240"/>
+            <a:ext cx="7863840" cy="493776"/>
           </a:xfrm>
           <a:prstGeom prst="rect">
             <a:avLst/>
@@ -23726,645 +23861,15 @@
             <a:r>
               <a:rPr lang="en-US" sz="1100" b="1" dirty="0">
                 <a:solidFill>
-                  <a:srgbClr val="1D1D1D"/>
+                  <a:srgbClr val="FF6652"/>
                 </a:solidFill>
                 <a:latin typeface="Lexend SemiBold" pitchFamily="34" charset="0"/>
                 <a:ea typeface="Lexend SemiBold" pitchFamily="34" charset="-122"/>
                 <a:cs typeface="Lexend SemiBold" pitchFamily="34" charset="-120"/>
               </a:rPr>
-              <a:t>Set the dates</a:t>
+              <a:t>A library joined mid-season and never got the announcement. Now the Chair sends them their own copy — one click.</a:t>
             </a:r>
             <a:endParaRPr lang="en-US" sz="1100" dirty="0"/>
-          </a:p>
-        </p:txBody>
-      </p:sp>
-      <p:sp>
-        <p:nvSpPr>
-          <p:cNvPr id="8" name="Text 6"/>
-          <p:cNvSpPr txBox="1"/>
-          <p:nvPr/>
-        </p:nvSpPr>
-        <p:spPr>
-          <a:xfrm>
-            <a:off x="603504" y="1755648"/>
-            <a:ext cx="2359152" cy="493776"/>
-          </a:xfrm>
-          <a:prstGeom prst="rect">
-            <a:avLst/>
-          </a:prstGeom>
-          <a:noFill/>
-          <a:ln/>
-        </p:spPr>
-        <p:txBody>
-          <a:bodyPr wrap="square" lIns="0" tIns="0" rIns="0" bIns="0" rtlCol="0" anchor="t"/>
-          <a:lstStyle/>
-          <a:p>
-            <a:pPr indent="0" marL="0">
-              <a:buNone/>
-            </a:pPr>
-            <a:r>
-              <a:rPr lang="en-US" sz="900" dirty="0">
-                <a:solidFill>
-                  <a:srgbClr val="1D1D1D"/>
-                </a:solidFill>
-                <a:latin typeface="Lexend" pitchFamily="34" charset="0"/>
-                <a:ea typeface="Lexend" pitchFamily="34" charset="-122"/>
-                <a:cs typeface="Lexend" pitchFamily="34" charset="-120"/>
-              </a:rPr>
-              <a:t>Opening, closing, fiscal year, publication — per year</a:t>
-            </a:r>
-            <a:endParaRPr lang="en-US" sz="900" dirty="0"/>
-          </a:p>
-        </p:txBody>
-      </p:sp>
-      <p:sp>
-        <p:nvSpPr>
-          <p:cNvPr id="9" name="Shape 7"/>
-          <p:cNvSpPr/>
-          <p:nvPr/>
-        </p:nvSpPr>
-        <p:spPr>
-          <a:xfrm>
-            <a:off x="3246120" y="1389888"/>
-            <a:ext cx="2651760" cy="932688"/>
-          </a:xfrm>
-          <a:prstGeom prst="roundRect">
-            <a:avLst>
-              <a:gd name="adj" fmla="val 5882"/>
-            </a:avLst>
-          </a:prstGeom>
-          <a:solidFill>
-            <a:srgbClr val="FFFFFF"/>
-          </a:solidFill>
-          <a:ln w="9525">
-            <a:solidFill>
-              <a:srgbClr val="DBC89F"/>
-            </a:solidFill>
-            <a:prstDash val="solid"/>
-          </a:ln>
-        </p:spPr>
-      </p:sp>
-      <p:sp>
-        <p:nvSpPr>
-          <p:cNvPr id="10" name="Text 8"/>
-          <p:cNvSpPr txBox="1"/>
-          <p:nvPr/>
-        </p:nvSpPr>
-        <p:spPr>
-          <a:xfrm>
-            <a:off x="3392424" y="1499616"/>
-            <a:ext cx="2359152" cy="237744"/>
-          </a:xfrm>
-          <a:prstGeom prst="rect">
-            <a:avLst/>
-          </a:prstGeom>
-          <a:noFill/>
-          <a:ln/>
-        </p:spPr>
-        <p:txBody>
-          <a:bodyPr wrap="square" lIns="0" tIns="0" rIns="0" bIns="0" rtlCol="0" anchor="ctr"/>
-          <a:lstStyle/>
-          <a:p>
-            <a:pPr indent="0" marL="0">
-              <a:buNone/>
-            </a:pPr>
-            <a:r>
-              <a:rPr lang="en-US" sz="1100" b="1" dirty="0">
-                <a:solidFill>
-                  <a:srgbClr val="1D1D1D"/>
-                </a:solidFill>
-                <a:latin typeface="Lexend SemiBold" pitchFamily="34" charset="0"/>
-                <a:ea typeface="Lexend SemiBold" pitchFamily="34" charset="-122"/>
-                <a:cs typeface="Lexend SemiBold" pitchFamily="34" charset="-120"/>
-              </a:rPr>
-              <a:t>Open a new year</a:t>
-            </a:r>
-            <a:endParaRPr lang="en-US" sz="1100" dirty="0"/>
-          </a:p>
-        </p:txBody>
-      </p:sp>
-      <p:sp>
-        <p:nvSpPr>
-          <p:cNvPr id="11" name="Text 9"/>
-          <p:cNvSpPr txBox="1"/>
-          <p:nvPr/>
-        </p:nvSpPr>
-        <p:spPr>
-          <a:xfrm>
-            <a:off x="3392424" y="1755648"/>
-            <a:ext cx="2359152" cy="493776"/>
-          </a:xfrm>
-          <a:prstGeom prst="rect">
-            <a:avLst/>
-          </a:prstGeom>
-          <a:noFill/>
-          <a:ln/>
-        </p:spPr>
-        <p:txBody>
-          <a:bodyPr wrap="square" lIns="0" tIns="0" rIns="0" bIns="0" rtlCol="0" anchor="t"/>
-          <a:lstStyle/>
-          <a:p>
-            <a:pPr indent="0" marL="0">
-              <a:buNone/>
-            </a:pPr>
-            <a:r>
-              <a:rPr lang="en-US" sz="900" dirty="0">
-                <a:solidFill>
-                  <a:srgbClr val="1D1D1D"/>
-                </a:solidFill>
-                <a:latin typeface="Lexend" pitchFamily="34" charset="0"/>
-                <a:ea typeface="Lexend" pitchFamily="34" charset="-122"/>
-                <a:cs typeface="Lexend" pitchFamily="34" charset="-120"/>
-              </a:rPr>
-              <a:t>Creates the year’s records for all 50 libraries at once</a:t>
-            </a:r>
-            <a:endParaRPr lang="en-US" sz="900" dirty="0"/>
-          </a:p>
-        </p:txBody>
-      </p:sp>
-      <p:sp>
-        <p:nvSpPr>
-          <p:cNvPr id="12" name="Shape 10"/>
-          <p:cNvSpPr/>
-          <p:nvPr/>
-        </p:nvSpPr>
-        <p:spPr>
-          <a:xfrm>
-            <a:off x="6035040" y="1389888"/>
-            <a:ext cx="2651760" cy="932688"/>
-          </a:xfrm>
-          <a:prstGeom prst="roundRect">
-            <a:avLst>
-              <a:gd name="adj" fmla="val 5882"/>
-            </a:avLst>
-          </a:prstGeom>
-          <a:solidFill>
-            <a:srgbClr val="FFFFFF"/>
-          </a:solidFill>
-          <a:ln w="9525">
-            <a:solidFill>
-              <a:srgbClr val="DBC89F"/>
-            </a:solidFill>
-            <a:prstDash val="solid"/>
-          </a:ln>
-        </p:spPr>
-      </p:sp>
-      <p:sp>
-        <p:nvSpPr>
-          <p:cNvPr id="13" name="Text 11"/>
-          <p:cNvSpPr txBox="1"/>
-          <p:nvPr/>
-        </p:nvSpPr>
-        <p:spPr>
-          <a:xfrm>
-            <a:off x="6181344" y="1499616"/>
-            <a:ext cx="2359152" cy="237744"/>
-          </a:xfrm>
-          <a:prstGeom prst="rect">
-            <a:avLst/>
-          </a:prstGeom>
-          <a:noFill/>
-          <a:ln/>
-        </p:spPr>
-        <p:txBody>
-          <a:bodyPr wrap="square" lIns="0" tIns="0" rIns="0" bIns="0" rtlCol="0" anchor="ctr"/>
-          <a:lstStyle/>
-          <a:p>
-            <a:pPr indent="0" marL="0">
-              <a:buNone/>
-            </a:pPr>
-            <a:r>
-              <a:rPr lang="en-US" sz="1100" b="1" dirty="0">
-                <a:solidFill>
-                  <a:srgbClr val="1D1D1D"/>
-                </a:solidFill>
-                <a:latin typeface="Lexend SemiBold" pitchFamily="34" charset="0"/>
-                <a:ea typeface="Lexend SemiBold" pitchFamily="34" charset="-122"/>
-                <a:cs typeface="Lexend SemiBold" pitchFamily="34" charset="-120"/>
-              </a:rPr>
-              <a:t>Open or close right now</a:t>
-            </a:r>
-            <a:endParaRPr lang="en-US" sz="1100" dirty="0"/>
-          </a:p>
-        </p:txBody>
-      </p:sp>
-      <p:sp>
-        <p:nvSpPr>
-          <p:cNvPr id="14" name="Text 12"/>
-          <p:cNvSpPr txBox="1"/>
-          <p:nvPr/>
-        </p:nvSpPr>
-        <p:spPr>
-          <a:xfrm>
-            <a:off x="6181344" y="1755648"/>
-            <a:ext cx="2359152" cy="493776"/>
-          </a:xfrm>
-          <a:prstGeom prst="rect">
-            <a:avLst/>
-          </a:prstGeom>
-          <a:noFill/>
-          <a:ln/>
-        </p:spPr>
-        <p:txBody>
-          <a:bodyPr wrap="square" lIns="0" tIns="0" rIns="0" bIns="0" rtlCol="0" anchor="t"/>
-          <a:lstStyle/>
-          <a:p>
-            <a:pPr indent="0" marL="0">
-              <a:buNone/>
-            </a:pPr>
-            <a:r>
-              <a:rPr lang="en-US" sz="900" dirty="0">
-                <a:solidFill>
-                  <a:srgbClr val="1D1D1D"/>
-                </a:solidFill>
-                <a:latin typeface="Lexend" pitchFamily="34" charset="0"/>
-                <a:ea typeface="Lexend" pitchFamily="34" charset="-122"/>
-                <a:cs typeface="Lexend" pitchFamily="34" charset="-120"/>
-              </a:rPr>
-              <a:t>An override for when the schedule slips</a:t>
-            </a:r>
-            <a:endParaRPr lang="en-US" sz="900" dirty="0"/>
-          </a:p>
-        </p:txBody>
-      </p:sp>
-      <p:sp>
-        <p:nvSpPr>
-          <p:cNvPr id="15" name="Shape 13"/>
-          <p:cNvSpPr/>
-          <p:nvPr/>
-        </p:nvSpPr>
-        <p:spPr>
-          <a:xfrm>
-            <a:off x="457200" y="2468880"/>
-            <a:ext cx="2651760" cy="932688"/>
-          </a:xfrm>
-          <a:prstGeom prst="roundRect">
-            <a:avLst>
-              <a:gd name="adj" fmla="val 5882"/>
-            </a:avLst>
-          </a:prstGeom>
-          <a:solidFill>
-            <a:srgbClr val="FFFFFF"/>
-          </a:solidFill>
-          <a:ln w="9525">
-            <a:solidFill>
-              <a:srgbClr val="DBC89F"/>
-            </a:solidFill>
-            <a:prstDash val="solid"/>
-          </a:ln>
-        </p:spPr>
-      </p:sp>
-      <p:sp>
-        <p:nvSpPr>
-          <p:cNvPr id="16" name="Text 14"/>
-          <p:cNvSpPr txBox="1"/>
-          <p:nvPr/>
-        </p:nvSpPr>
-        <p:spPr>
-          <a:xfrm>
-            <a:off x="603504" y="2578608"/>
-            <a:ext cx="2359152" cy="237744"/>
-          </a:xfrm>
-          <a:prstGeom prst="rect">
-            <a:avLst/>
-          </a:prstGeom>
-          <a:noFill/>
-          <a:ln/>
-        </p:spPr>
-        <p:txBody>
-          <a:bodyPr wrap="square" lIns="0" tIns="0" rIns="0" bIns="0" rtlCol="0" anchor="ctr"/>
-          <a:lstStyle/>
-          <a:p>
-            <a:pPr indent="0" marL="0">
-              <a:buNone/>
-            </a:pPr>
-            <a:r>
-              <a:rPr lang="en-US" sz="1100" b="1" dirty="0">
-                <a:solidFill>
-                  <a:srgbClr val="1D1D1D"/>
-                </a:solidFill>
-                <a:latin typeface="Lexend SemiBold" pitchFamily="34" charset="0"/>
-                <a:ea typeface="Lexend SemiBold" pitchFamily="34" charset="-122"/>
-                <a:cs typeface="Lexend SemiBold" pitchFamily="34" charset="-120"/>
-              </a:rPr>
-              <a:t>Send the announcement</a:t>
-            </a:r>
-            <a:endParaRPr lang="en-US" sz="1100" dirty="0"/>
-          </a:p>
-        </p:txBody>
-      </p:sp>
-      <p:sp>
-        <p:nvSpPr>
-          <p:cNvPr id="17" name="Text 15"/>
-          <p:cNvSpPr txBox="1"/>
-          <p:nvPr/>
-        </p:nvSpPr>
-        <p:spPr>
-          <a:xfrm>
-            <a:off x="603504" y="2834640"/>
-            <a:ext cx="2359152" cy="493776"/>
-          </a:xfrm>
-          <a:prstGeom prst="rect">
-            <a:avLst/>
-          </a:prstGeom>
-          <a:noFill/>
-          <a:ln/>
-        </p:spPr>
-        <p:txBody>
-          <a:bodyPr wrap="square" lIns="0" tIns="0" rIns="0" bIns="0" rtlCol="0" anchor="t"/>
-          <a:lstStyle/>
-          <a:p>
-            <a:pPr indent="0" marL="0">
-              <a:buNone/>
-            </a:pPr>
-            <a:r>
-              <a:rPr lang="en-US" sz="900" dirty="0">
-                <a:solidFill>
-                  <a:srgbClr val="1D1D1D"/>
-                </a:solidFill>
-                <a:latin typeface="Lexend" pitchFamily="34" charset="0"/>
-                <a:ea typeface="Lexend" pitchFamily="34" charset="-122"/>
-                <a:cs typeface="Lexend" pitchFamily="34" charset="-120"/>
-              </a:rPr>
-              <a:t>Preview it, confirm it, send now or schedule it</a:t>
-            </a:r>
-            <a:endParaRPr lang="en-US" sz="900" dirty="0"/>
-          </a:p>
-        </p:txBody>
-      </p:sp>
-      <p:sp>
-        <p:nvSpPr>
-          <p:cNvPr id="18" name="Shape 16"/>
-          <p:cNvSpPr/>
-          <p:nvPr/>
-        </p:nvSpPr>
-        <p:spPr>
-          <a:xfrm>
-            <a:off x="3246120" y="2468880"/>
-            <a:ext cx="2651760" cy="932688"/>
-          </a:xfrm>
-          <a:prstGeom prst="roundRect">
-            <a:avLst>
-              <a:gd name="adj" fmla="val 5882"/>
-            </a:avLst>
-          </a:prstGeom>
-          <a:solidFill>
-            <a:srgbClr val="FFFFFF"/>
-          </a:solidFill>
-          <a:ln w="9525">
-            <a:solidFill>
-              <a:srgbClr val="DBC89F"/>
-            </a:solidFill>
-            <a:prstDash val="solid"/>
-          </a:ln>
-        </p:spPr>
-      </p:sp>
-      <p:sp>
-        <p:nvSpPr>
-          <p:cNvPr id="19" name="Text 17"/>
-          <p:cNvSpPr txBox="1"/>
-          <p:nvPr/>
-        </p:nvSpPr>
-        <p:spPr>
-          <a:xfrm>
-            <a:off x="3392424" y="2578608"/>
-            <a:ext cx="2359152" cy="237744"/>
-          </a:xfrm>
-          <a:prstGeom prst="rect">
-            <a:avLst/>
-          </a:prstGeom>
-          <a:noFill/>
-          <a:ln/>
-        </p:spPr>
-        <p:txBody>
-          <a:bodyPr wrap="square" lIns="0" tIns="0" rIns="0" bIns="0" rtlCol="0" anchor="ctr"/>
-          <a:lstStyle/>
-          <a:p>
-            <a:pPr indent="0" marL="0">
-              <a:buNone/>
-            </a:pPr>
-            <a:r>
-              <a:rPr lang="en-US" sz="1100" b="1" dirty="0">
-                <a:solidFill>
-                  <a:srgbClr val="1D1D1D"/>
-                </a:solidFill>
-                <a:latin typeface="Lexend SemiBold" pitchFamily="34" charset="0"/>
-                <a:ea typeface="Lexend SemiBold" pitchFamily="34" charset="-122"/>
-                <a:cs typeface="Lexend SemiBold" pitchFamily="34" charset="-120"/>
-              </a:rPr>
-              <a:t>Edit the wording</a:t>
-            </a:r>
-            <a:endParaRPr lang="en-US" sz="1100" dirty="0"/>
-          </a:p>
-        </p:txBody>
-      </p:sp>
-      <p:sp>
-        <p:nvSpPr>
-          <p:cNvPr id="20" name="Text 18"/>
-          <p:cNvSpPr txBox="1"/>
-          <p:nvPr/>
-        </p:nvSpPr>
-        <p:spPr>
-          <a:xfrm>
-            <a:off x="3392424" y="2834640"/>
-            <a:ext cx="2359152" cy="493776"/>
-          </a:xfrm>
-          <a:prstGeom prst="rect">
-            <a:avLst/>
-          </a:prstGeom>
-          <a:noFill/>
-          <a:ln/>
-        </p:spPr>
-        <p:txBody>
-          <a:bodyPr wrap="square" lIns="0" tIns="0" rIns="0" bIns="0" rtlCol="0" anchor="t"/>
-          <a:lstStyle/>
-          <a:p>
-            <a:pPr indent="0" marL="0">
-              <a:buNone/>
-            </a:pPr>
-            <a:r>
-              <a:rPr lang="en-US" sz="900" dirty="0">
-                <a:solidFill>
-                  <a:srgbClr val="1D1D1D"/>
-                </a:solidFill>
-                <a:latin typeface="Lexend" pitchFamily="34" charset="0"/>
-                <a:ea typeface="Lexend" pitchFamily="34" charset="-122"/>
-                <a:cs typeface="Lexend" pitchFamily="34" charset="-120"/>
-              </a:rPr>
-              <a:t>Of every automatic message, in the browser</a:t>
-            </a:r>
-            <a:endParaRPr lang="en-US" sz="900" dirty="0"/>
-          </a:p>
-        </p:txBody>
-      </p:sp>
-      <p:sp>
-        <p:nvSpPr>
-          <p:cNvPr id="21" name="Shape 19"/>
-          <p:cNvSpPr/>
-          <p:nvPr/>
-        </p:nvSpPr>
-        <p:spPr>
-          <a:xfrm>
-            <a:off x="6035040" y="2468880"/>
-            <a:ext cx="2651760" cy="932688"/>
-          </a:xfrm>
-          <a:prstGeom prst="roundRect">
-            <a:avLst>
-              <a:gd name="adj" fmla="val 5882"/>
-            </a:avLst>
-          </a:prstGeom>
-          <a:solidFill>
-            <a:srgbClr val="D8E4D6"/>
-          </a:solidFill>
-          <a:ln w="9525">
-            <a:solidFill>
-              <a:srgbClr val="DBC89F"/>
-            </a:solidFill>
-            <a:prstDash val="solid"/>
-          </a:ln>
-        </p:spPr>
-      </p:sp>
-      <p:sp>
-        <p:nvSpPr>
-          <p:cNvPr id="22" name="Text 20"/>
-          <p:cNvSpPr txBox="1"/>
-          <p:nvPr/>
-        </p:nvSpPr>
-        <p:spPr>
-          <a:xfrm>
-            <a:off x="6181344" y="2578608"/>
-            <a:ext cx="2359152" cy="237744"/>
-          </a:xfrm>
-          <a:prstGeom prst="rect">
-            <a:avLst/>
-          </a:prstGeom>
-          <a:noFill/>
-          <a:ln/>
-        </p:spPr>
-        <p:txBody>
-          <a:bodyPr wrap="square" lIns="0" tIns="0" rIns="0" bIns="0" rtlCol="0" anchor="ctr"/>
-          <a:lstStyle/>
-          <a:p>
-            <a:pPr indent="0" marL="0">
-              <a:buNone/>
-            </a:pPr>
-            <a:r>
-              <a:rPr lang="en-US" sz="1100" b="1" dirty="0">
-                <a:solidFill>
-                  <a:srgbClr val="FF6652"/>
-                </a:solidFill>
-                <a:latin typeface="Lexend SemiBold" pitchFamily="34" charset="0"/>
-                <a:ea typeface="Lexend SemiBold" pitchFamily="34" charset="-122"/>
-                <a:cs typeface="Lexend SemiBold" pitchFamily="34" charset="-120"/>
-              </a:rPr>
-              <a:t>Email one person</a:t>
-            </a:r>
-            <a:endParaRPr lang="en-US" sz="1100" dirty="0"/>
-          </a:p>
-        </p:txBody>
-      </p:sp>
-      <p:sp>
-        <p:nvSpPr>
-          <p:cNvPr id="23" name="Text 21"/>
-          <p:cNvSpPr txBox="1"/>
-          <p:nvPr/>
-        </p:nvSpPr>
-        <p:spPr>
-          <a:xfrm>
-            <a:off x="6181344" y="2834640"/>
-            <a:ext cx="2359152" cy="493776"/>
-          </a:xfrm>
-          <a:prstGeom prst="rect">
-            <a:avLst/>
-          </a:prstGeom>
-          <a:noFill/>
-          <a:ln/>
-        </p:spPr>
-        <p:txBody>
-          <a:bodyPr wrap="square" lIns="0" tIns="0" rIns="0" bIns="0" rtlCol="0" anchor="t"/>
-          <a:lstStyle/>
-          <a:p>
-            <a:pPr indent="0" marL="0">
-              <a:buNone/>
-            </a:pPr>
-            <a:r>
-              <a:rPr lang="en-US" sz="900" dirty="0">
-                <a:solidFill>
-                  <a:srgbClr val="1D1D1D"/>
-                </a:solidFill>
-                <a:latin typeface="Lexend" pitchFamily="34" charset="0"/>
-                <a:ea typeface="Lexend" pitchFamily="34" charset="-122"/>
-                <a:cs typeface="Lexend" pitchFamily="34" charset="-120"/>
-              </a:rPr>
-              <a:t>For the library that joined after the announcement went out</a:t>
-            </a:r>
-            <a:endParaRPr lang="en-US" sz="900" dirty="0"/>
-          </a:p>
-        </p:txBody>
-      </p:sp>
-      <p:sp>
-        <p:nvSpPr>
-          <p:cNvPr id="24" name="Shape 22"/>
-          <p:cNvSpPr/>
-          <p:nvPr/>
-        </p:nvSpPr>
-        <p:spPr>
-          <a:xfrm>
-            <a:off x="457200" y="3675888"/>
-            <a:ext cx="8229600" cy="566928"/>
-          </a:xfrm>
-          <a:prstGeom prst="roundRect">
-            <a:avLst>
-              <a:gd name="adj" fmla="val 9677"/>
-            </a:avLst>
-          </a:prstGeom>
-          <a:solidFill>
-            <a:srgbClr val="D8E4D6"/>
-          </a:solidFill>
-          <a:ln w="9525">
-            <a:solidFill>
-              <a:srgbClr val="DBC89F"/>
-            </a:solidFill>
-            <a:prstDash val="solid"/>
-          </a:ln>
-        </p:spPr>
-      </p:sp>
-      <p:sp>
-        <p:nvSpPr>
-          <p:cNvPr id="25" name="Text 23"/>
-          <p:cNvSpPr txBox="1"/>
-          <p:nvPr/>
-        </p:nvSpPr>
-        <p:spPr>
-          <a:xfrm>
-            <a:off x="640080" y="3712464"/>
-            <a:ext cx="7863840" cy="493776"/>
-          </a:xfrm>
-          <a:prstGeom prst="rect">
-            <a:avLst/>
-          </a:prstGeom>
-          <a:noFill/>
-          <a:ln/>
-        </p:spPr>
-        <p:txBody>
-          <a:bodyPr wrap="square" lIns="0" tIns="0" rIns="0" bIns="0" rtlCol="0" anchor="ctr"/>
-          <a:lstStyle/>
-          <a:p>
-            <a:pPr indent="0" marL="0">
-              <a:buNone/>
-            </a:pPr>
-            <a:r>
-              <a:rPr lang="en-US" sz="1150" b="1" dirty="0">
-                <a:solidFill>
-                  <a:srgbClr val="FF6652"/>
-                </a:solidFill>
-                <a:latin typeface="Lexend SemiBold" pitchFamily="34" charset="0"/>
-                <a:ea typeface="Lexend SemiBold" pitchFamily="34" charset="-122"/>
-                <a:cs typeface="Lexend SemiBold" pitchFamily="34" charset="-120"/>
-              </a:rPr>
-              <a:t>A library joined mid-season and never got the announcement. Now the Chair sends them their own copy — one click.</a:t>
-            </a:r>
-            <a:endParaRPr lang="en-US" sz="1150" dirty="0"/>
           </a:p>
         </p:txBody>
       </p:sp>
